--- a/Output/DCM_Weekly_July_04_2026.pptx
+++ b/Output/DCM_Weekly_July_04_2026.pptx
@@ -18,6 +18,7 @@
     <p:sldId id="266" r:id="rId17"/>
     <p:sldId id="267" r:id="rId18"/>
     <p:sldId id="268" r:id="rId19"/>
+    <p:sldId id="269" r:id="rId20"/>
   </p:sldIdLst>
   <p:sldSz cx="12191695" cy="6858000" type="screen4x3"/>
   <p:notesSz cx="6858000" cy="9144000"/>
@@ -620,13 +621,13 @@
                 <c:formatCode>General</c:formatCode>
                 <c:ptCount val="3"/>
                 <c:pt idx="0">
-                  <c:v>0.02335</c:v>
+                  <c:v>2.335</c:v>
                 </c:pt>
                 <c:pt idx="1">
-                  <c:v>0.02565</c:v>
+                  <c:v>2.565</c:v>
                 </c:pt>
                 <c:pt idx="2">
-                  <c:v>0.02733</c:v>
+                  <c:v>2.733</c:v>
                 </c:pt>
               </c:numCache>
             </c:numRef>
@@ -7570,7 +7571,7 @@
                 </a:solidFill>
                 <a:latin typeface="Calibri"/>
               </a:rPr>
-              <a:t>SPECIAL ISSUE · MPS27H1, BANGLADESH BANK, POLICY, FY 2026-27 · JULY 04, 2026</a:t>
+              <a:t>SPECIAL ISSUE · MPS27H1, BANGLADESH BANK, POLICY, FY 2026-27 · JULY 04, 2026  (cont. 1/2)</a:t>
             </a:r>
           </a:p>
         </p:txBody>
@@ -7619,7 +7620,7 @@
         <p:spPr>
           <a:xfrm>
             <a:off x="457200" y="1783080"/>
-            <a:ext cx="11274552" cy="4206240"/>
+            <a:ext cx="11274552" cy="4224528"/>
           </a:xfrm>
           <a:prstGeom prst="roundRect">
             <a:avLst/>
@@ -7663,7 +7664,7 @@
         <p:spPr>
           <a:xfrm>
             <a:off x="457200" y="1783080"/>
-            <a:ext cx="109728" cy="4206240"/>
+            <a:ext cx="109728" cy="4224528"/>
           </a:xfrm>
           <a:prstGeom prst="rect">
             <a:avLst/>
@@ -7706,7 +7707,7 @@
         </p:nvSpPr>
         <p:spPr>
           <a:xfrm>
-            <a:off x="822960" y="2011680"/>
+            <a:off x="822960" y="1984248"/>
             <a:ext cx="10058400" cy="274320"/>
           </a:xfrm>
           <a:prstGeom prst="rect">
@@ -7741,7 +7742,7 @@
         </p:nvSpPr>
         <p:spPr>
           <a:xfrm>
-            <a:off x="822960" y="2514600"/>
+            <a:off x="822960" y="2441448"/>
             <a:ext cx="274320" cy="365760"/>
           </a:xfrm>
           <a:prstGeom prst="rect">
@@ -7757,7 +7758,7 @@
           <a:p>
             <a:pPr algn="l"/>
             <a:r>
-              <a:rPr sz="1200" b="0" i="0">
+              <a:rPr sz="1000" b="0" i="0">
                 <a:solidFill>
                   <a:srgbClr val="C9A227"/>
                 </a:solidFill>
@@ -7776,23 +7777,23 @@
         </p:nvSpPr>
         <p:spPr>
           <a:xfrm>
-            <a:off x="1143000" y="2514600"/>
-            <a:ext cx="10241280" cy="731520"/>
-          </a:xfrm>
-          <a:prstGeom prst="rect">
-            <a:avLst/>
-          </a:prstGeom>
-          <a:noFill/>
-        </p:spPr>
-        <p:txBody>
-          <a:bodyPr wrap="square" anchor="t" lIns="25400" rIns="25400" tIns="12700" bIns="12700">
-            <a:spAutoFit/>
-          </a:bodyPr>
-          <a:lstStyle/>
-          <a:p>
-            <a:pPr algn="l"/>
-            <a:r>
-              <a:rPr sz="1400" b="0" i="0">
+            <a:off x="1143000" y="2441448"/>
+            <a:ext cx="10241280" cy="420624"/>
+          </a:xfrm>
+          <a:prstGeom prst="rect">
+            <a:avLst/>
+          </a:prstGeom>
+          <a:noFill/>
+        </p:spPr>
+        <p:txBody>
+          <a:bodyPr wrap="square" anchor="t" lIns="25400" rIns="25400" tIns="12700" bIns="12700">
+            <a:spAutoFit/>
+          </a:bodyPr>
+          <a:lstStyle/>
+          <a:p>
+            <a:pPr algn="l"/>
+            <a:r>
+              <a:rPr sz="1000" b="0" i="0">
                 <a:solidFill>
                   <a:srgbClr val="CADCFC"/>
                 </a:solidFill>
@@ -7811,7 +7812,7 @@
         </p:nvSpPr>
         <p:spPr>
           <a:xfrm>
-            <a:off x="822960" y="3319272"/>
+            <a:off x="822960" y="2953512"/>
             <a:ext cx="274320" cy="365760"/>
           </a:xfrm>
           <a:prstGeom prst="rect">
@@ -7827,7 +7828,7 @@
           <a:p>
             <a:pPr algn="l"/>
             <a:r>
-              <a:rPr sz="1200" b="0" i="0">
+              <a:rPr sz="1000" b="0" i="0">
                 <a:solidFill>
                   <a:srgbClr val="C9A227"/>
                 </a:solidFill>
@@ -7846,23 +7847,23 @@
         </p:nvSpPr>
         <p:spPr>
           <a:xfrm>
-            <a:off x="1143000" y="3319272"/>
-            <a:ext cx="10241280" cy="731520"/>
-          </a:xfrm>
-          <a:prstGeom prst="rect">
-            <a:avLst/>
-          </a:prstGeom>
-          <a:noFill/>
-        </p:spPr>
-        <p:txBody>
-          <a:bodyPr wrap="square" anchor="t" lIns="25400" rIns="25400" tIns="12700" bIns="12700">
-            <a:spAutoFit/>
-          </a:bodyPr>
-          <a:lstStyle/>
-          <a:p>
-            <a:pPr algn="l"/>
-            <a:r>
-              <a:rPr sz="1400" b="0" i="0">
+            <a:off x="1143000" y="2953512"/>
+            <a:ext cx="10241280" cy="420624"/>
+          </a:xfrm>
+          <a:prstGeom prst="rect">
+            <a:avLst/>
+          </a:prstGeom>
+          <a:noFill/>
+        </p:spPr>
+        <p:txBody>
+          <a:bodyPr wrap="square" anchor="t" lIns="25400" rIns="25400" tIns="12700" bIns="12700">
+            <a:spAutoFit/>
+          </a:bodyPr>
+          <a:lstStyle/>
+          <a:p>
+            <a:pPr algn="l"/>
+            <a:r>
+              <a:rPr sz="1000" b="0" i="0">
                 <a:solidFill>
                   <a:srgbClr val="CADCFC"/>
                 </a:solidFill>
@@ -7881,7 +7882,7 @@
         </p:nvSpPr>
         <p:spPr>
           <a:xfrm>
-            <a:off x="822960" y="4123944"/>
+            <a:off x="822960" y="3465576"/>
             <a:ext cx="274320" cy="365760"/>
           </a:xfrm>
           <a:prstGeom prst="rect">
@@ -7897,7 +7898,7 @@
           <a:p>
             <a:pPr algn="l"/>
             <a:r>
-              <a:rPr sz="1200" b="0" i="0">
+              <a:rPr sz="1000" b="0" i="0">
                 <a:solidFill>
                   <a:srgbClr val="C9A227"/>
                 </a:solidFill>
@@ -7916,23 +7917,23 @@
         </p:nvSpPr>
         <p:spPr>
           <a:xfrm>
-            <a:off x="1143000" y="4123944"/>
-            <a:ext cx="10241280" cy="731520"/>
-          </a:xfrm>
-          <a:prstGeom prst="rect">
-            <a:avLst/>
-          </a:prstGeom>
-          <a:noFill/>
-        </p:spPr>
-        <p:txBody>
-          <a:bodyPr wrap="square" anchor="t" lIns="25400" rIns="25400" tIns="12700" bIns="12700">
-            <a:spAutoFit/>
-          </a:bodyPr>
-          <a:lstStyle/>
-          <a:p>
-            <a:pPr algn="l"/>
-            <a:r>
-              <a:rPr sz="1400" b="0" i="0">
+            <a:off x="1143000" y="3465576"/>
+            <a:ext cx="10241280" cy="420624"/>
+          </a:xfrm>
+          <a:prstGeom prst="rect">
+            <a:avLst/>
+          </a:prstGeom>
+          <a:noFill/>
+        </p:spPr>
+        <p:txBody>
+          <a:bodyPr wrap="square" anchor="t" lIns="25400" rIns="25400" tIns="12700" bIns="12700">
+            <a:spAutoFit/>
+          </a:bodyPr>
+          <a:lstStyle/>
+          <a:p>
+            <a:pPr algn="l"/>
+            <a:r>
+              <a:rPr sz="1000" b="0" i="0">
                 <a:solidFill>
                   <a:srgbClr val="CADCFC"/>
                 </a:solidFill>
@@ -7951,7 +7952,7 @@
         </p:nvSpPr>
         <p:spPr>
           <a:xfrm>
-            <a:off x="822960" y="4654296"/>
+            <a:off x="822960" y="3977639"/>
             <a:ext cx="274320" cy="365760"/>
           </a:xfrm>
           <a:prstGeom prst="rect">
@@ -7967,7 +7968,7 @@
           <a:p>
             <a:pPr algn="l"/>
             <a:r>
-              <a:rPr sz="1200" b="0" i="0">
+              <a:rPr sz="1000" b="0" i="0">
                 <a:solidFill>
                   <a:srgbClr val="C9A227"/>
                 </a:solidFill>
@@ -7986,23 +7987,23 @@
         </p:nvSpPr>
         <p:spPr>
           <a:xfrm>
-            <a:off x="1143000" y="4654296"/>
-            <a:ext cx="10241280" cy="731520"/>
-          </a:xfrm>
-          <a:prstGeom prst="rect">
-            <a:avLst/>
-          </a:prstGeom>
-          <a:noFill/>
-        </p:spPr>
-        <p:txBody>
-          <a:bodyPr wrap="square" anchor="t" lIns="25400" rIns="25400" tIns="12700" bIns="12700">
-            <a:spAutoFit/>
-          </a:bodyPr>
-          <a:lstStyle/>
-          <a:p>
-            <a:pPr algn="l"/>
-            <a:r>
-              <a:rPr sz="1400" b="0" i="0">
+            <a:off x="1143000" y="3977639"/>
+            <a:ext cx="10241280" cy="420624"/>
+          </a:xfrm>
+          <a:prstGeom prst="rect">
+            <a:avLst/>
+          </a:prstGeom>
+          <a:noFill/>
+        </p:spPr>
+        <p:txBody>
+          <a:bodyPr wrap="square" anchor="t" lIns="25400" rIns="25400" tIns="12700" bIns="12700">
+            <a:spAutoFit/>
+          </a:bodyPr>
+          <a:lstStyle/>
+          <a:p>
+            <a:pPr algn="l"/>
+            <a:r>
+              <a:rPr sz="1000" b="0" i="0">
                 <a:solidFill>
                   <a:srgbClr val="CADCFC"/>
                 </a:solidFill>
@@ -8021,7 +8022,7 @@
         </p:nvSpPr>
         <p:spPr>
           <a:xfrm>
-            <a:off x="822960" y="5458968"/>
+            <a:off x="822960" y="4489704"/>
             <a:ext cx="274320" cy="365760"/>
           </a:xfrm>
           <a:prstGeom prst="rect">
@@ -8037,7 +8038,7 @@
           <a:p>
             <a:pPr algn="l"/>
             <a:r>
-              <a:rPr sz="1200" b="0" i="0">
+              <a:rPr sz="1000" b="0" i="0">
                 <a:solidFill>
                   <a:srgbClr val="C9A227"/>
                 </a:solidFill>
@@ -8056,23 +8057,23 @@
         </p:nvSpPr>
         <p:spPr>
           <a:xfrm>
-            <a:off x="1143000" y="5458968"/>
-            <a:ext cx="10241280" cy="731520"/>
-          </a:xfrm>
-          <a:prstGeom prst="rect">
-            <a:avLst/>
-          </a:prstGeom>
-          <a:noFill/>
-        </p:spPr>
-        <p:txBody>
-          <a:bodyPr wrap="square" anchor="t" lIns="25400" rIns="25400" tIns="12700" bIns="12700">
-            <a:spAutoFit/>
-          </a:bodyPr>
-          <a:lstStyle/>
-          <a:p>
-            <a:pPr algn="l"/>
-            <a:r>
-              <a:rPr sz="1400" b="0" i="0">
+            <a:off x="1143000" y="4489704"/>
+            <a:ext cx="10241280" cy="420624"/>
+          </a:xfrm>
+          <a:prstGeom prst="rect">
+            <a:avLst/>
+          </a:prstGeom>
+          <a:noFill/>
+        </p:spPr>
+        <p:txBody>
+          <a:bodyPr wrap="square" anchor="t" lIns="25400" rIns="25400" tIns="12700" bIns="12700">
+            <a:spAutoFit/>
+          </a:bodyPr>
+          <a:lstStyle/>
+          <a:p>
+            <a:pPr algn="l"/>
+            <a:r>
+              <a:rPr sz="1000" b="0" i="0">
                 <a:solidFill>
                   <a:srgbClr val="CADCFC"/>
                 </a:solidFill>
@@ -8091,7 +8092,7 @@
         </p:nvSpPr>
         <p:spPr>
           <a:xfrm>
-            <a:off x="822960" y="6263640"/>
+            <a:off x="822960" y="5001768"/>
             <a:ext cx="274320" cy="365760"/>
           </a:xfrm>
           <a:prstGeom prst="rect">
@@ -8107,7 +8108,7 @@
           <a:p>
             <a:pPr algn="l"/>
             <a:r>
-              <a:rPr sz="1200" b="0" i="0">
+              <a:rPr sz="1000" b="0" i="0">
                 <a:solidFill>
                   <a:srgbClr val="C9A227"/>
                 </a:solidFill>
@@ -8126,23 +8127,23 @@
         </p:nvSpPr>
         <p:spPr>
           <a:xfrm>
-            <a:off x="1143000" y="6263640"/>
-            <a:ext cx="10241280" cy="731520"/>
-          </a:xfrm>
-          <a:prstGeom prst="rect">
-            <a:avLst/>
-          </a:prstGeom>
-          <a:noFill/>
-        </p:spPr>
-        <p:txBody>
-          <a:bodyPr wrap="square" anchor="t" lIns="25400" rIns="25400" tIns="12700" bIns="12700">
-            <a:spAutoFit/>
-          </a:bodyPr>
-          <a:lstStyle/>
-          <a:p>
-            <a:pPr algn="l"/>
-            <a:r>
-              <a:rPr sz="1400" b="0" i="0">
+            <a:off x="1143000" y="5001768"/>
+            <a:ext cx="10241280" cy="420624"/>
+          </a:xfrm>
+          <a:prstGeom prst="rect">
+            <a:avLst/>
+          </a:prstGeom>
+          <a:noFill/>
+        </p:spPr>
+        <p:txBody>
+          <a:bodyPr wrap="square" anchor="t" lIns="25400" rIns="25400" tIns="12700" bIns="12700">
+            <a:spAutoFit/>
+          </a:bodyPr>
+          <a:lstStyle/>
+          <a:p>
+            <a:pPr algn="l"/>
+            <a:r>
+              <a:rPr sz="1000" b="0" i="0">
                 <a:solidFill>
                   <a:srgbClr val="CADCFC"/>
                 </a:solidFill>
@@ -8161,7 +8162,7 @@
         </p:nvSpPr>
         <p:spPr>
           <a:xfrm>
-            <a:off x="822960" y="7068312"/>
+            <a:off x="822960" y="5513832"/>
             <a:ext cx="274320" cy="365760"/>
           </a:xfrm>
           <a:prstGeom prst="rect">
@@ -8177,7 +8178,7 @@
           <a:p>
             <a:pPr algn="l"/>
             <a:r>
-              <a:rPr sz="1200" b="0" i="0">
+              <a:rPr sz="1000" b="0" i="0">
                 <a:solidFill>
                   <a:srgbClr val="C9A227"/>
                 </a:solidFill>
@@ -8196,23 +8197,23 @@
         </p:nvSpPr>
         <p:spPr>
           <a:xfrm>
-            <a:off x="1143000" y="7068312"/>
-            <a:ext cx="10241280" cy="731520"/>
-          </a:xfrm>
-          <a:prstGeom prst="rect">
-            <a:avLst/>
-          </a:prstGeom>
-          <a:noFill/>
-        </p:spPr>
-        <p:txBody>
-          <a:bodyPr wrap="square" anchor="t" lIns="25400" rIns="25400" tIns="12700" bIns="12700">
-            <a:spAutoFit/>
-          </a:bodyPr>
-          <a:lstStyle/>
-          <a:p>
-            <a:pPr algn="l"/>
-            <a:r>
-              <a:rPr sz="1400" b="0" i="0">
+            <a:off x="1143000" y="5513832"/>
+            <a:ext cx="10241280" cy="420624"/>
+          </a:xfrm>
+          <a:prstGeom prst="rect">
+            <a:avLst/>
+          </a:prstGeom>
+          <a:noFill/>
+        </p:spPr>
+        <p:txBody>
+          <a:bodyPr wrap="square" anchor="t" lIns="25400" rIns="25400" tIns="12700" bIns="12700">
+            <a:spAutoFit/>
+          </a:bodyPr>
+          <a:lstStyle/>
+          <a:p>
+            <a:pPr algn="l"/>
+            <a:r>
+              <a:rPr sz="1000" b="0" i="0">
                 <a:solidFill>
                   <a:srgbClr val="CADCFC"/>
                 </a:solidFill>
@@ -8226,76 +8227,6 @@
       <p:sp>
         <p:nvSpPr>
           <p:cNvPr id="23" name="TextBox 22"/>
-          <p:cNvSpPr txBox="1"/>
-          <p:nvPr/>
-        </p:nvSpPr>
-        <p:spPr>
-          <a:xfrm>
-            <a:off x="822960" y="7872983"/>
-            <a:ext cx="274320" cy="365760"/>
-          </a:xfrm>
-          <a:prstGeom prst="rect">
-            <a:avLst/>
-          </a:prstGeom>
-          <a:noFill/>
-        </p:spPr>
-        <p:txBody>
-          <a:bodyPr wrap="square" anchor="t" lIns="25400" rIns="25400" tIns="12700" bIns="12700">
-            <a:spAutoFit/>
-          </a:bodyPr>
-          <a:lstStyle/>
-          <a:p>
-            <a:pPr algn="l"/>
-            <a:r>
-              <a:rPr sz="1200" b="0" i="0">
-                <a:solidFill>
-                  <a:srgbClr val="C9A227"/>
-                </a:solidFill>
-                <a:latin typeface="Calibri"/>
-              </a:rPr>
-              <a:t>◆</a:t>
-            </a:r>
-          </a:p>
-        </p:txBody>
-      </p:sp>
-      <p:sp>
-        <p:nvSpPr>
-          <p:cNvPr id="24" name="TextBox 23"/>
-          <p:cNvSpPr txBox="1"/>
-          <p:nvPr/>
-        </p:nvSpPr>
-        <p:spPr>
-          <a:xfrm>
-            <a:off x="1143000" y="7872983"/>
-            <a:ext cx="10241280" cy="731520"/>
-          </a:xfrm>
-          <a:prstGeom prst="rect">
-            <a:avLst/>
-          </a:prstGeom>
-          <a:noFill/>
-        </p:spPr>
-        <p:txBody>
-          <a:bodyPr wrap="square" anchor="t" lIns="25400" rIns="25400" tIns="12700" bIns="12700">
-            <a:spAutoFit/>
-          </a:bodyPr>
-          <a:lstStyle/>
-          <a:p>
-            <a:pPr algn="l"/>
-            <a:r>
-              <a:rPr sz="1400" b="0" i="0">
-                <a:solidFill>
-                  <a:srgbClr val="CADCFC"/>
-                </a:solidFill>
-                <a:latin typeface="Calibri"/>
-              </a:rPr>
-              <a:t>Key risks: Middle East conflict, energy/fertilizer price shocks, high NPLs, weak private investment</a:t>
-            </a:r>
-          </a:p>
-        </p:txBody>
-      </p:sp>
-      <p:sp>
-        <p:nvSpPr>
-          <p:cNvPr id="25" name="TextBox 24"/>
           <p:cNvSpPr txBox="1"/>
           <p:nvPr/>
         </p:nvSpPr>
@@ -8330,7 +8261,7 @@
       </p:sp>
       <p:sp>
         <p:nvSpPr>
-          <p:cNvPr id="26" name="TextBox 25"/>
+          <p:cNvPr id="24" name="TextBox 23"/>
           <p:cNvSpPr txBox="1"/>
           <p:nvPr/>
         </p:nvSpPr>
@@ -8498,7 +8429,7 @@
                 </a:solidFill>
                 <a:latin typeface="Calibri"/>
               </a:rPr>
-              <a:t>LOOKING AHEAD</a:t>
+              <a:t>SPECIAL ISSUE · MPS27H1, BANGLADESH BANK, POLICY, FY 2026-27 · JULY 04, 2026  (cont. 2/2)</a:t>
             </a:r>
           </a:p>
         </p:txBody>
@@ -8512,158 +8443,51 @@
         <p:spPr>
           <a:xfrm>
             <a:off x="438912" y="768096"/>
-            <a:ext cx="11155680" cy="640080"/>
-          </a:xfrm>
-          <a:prstGeom prst="rect">
-            <a:avLst/>
-          </a:prstGeom>
-          <a:noFill/>
-        </p:spPr>
-        <p:txBody>
-          <a:bodyPr wrap="square" anchor="t" lIns="25400" rIns="25400" tIns="12700" bIns="12700">
-            <a:spAutoFit/>
-          </a:bodyPr>
-          <a:lstStyle/>
-          <a:p>
-            <a:pPr algn="l"/>
-            <a:r>
-              <a:rPr sz="3000" b="1" i="0">
+            <a:ext cx="11155680" cy="731520"/>
+          </a:xfrm>
+          <a:prstGeom prst="rect">
+            <a:avLst/>
+          </a:prstGeom>
+          <a:noFill/>
+        </p:spPr>
+        <p:txBody>
+          <a:bodyPr wrap="square" anchor="t" lIns="25400" rIns="25400" tIns="12700" bIns="12700">
+            <a:spAutoFit/>
+          </a:bodyPr>
+          <a:lstStyle/>
+          <a:p>
+            <a:pPr algn="l"/>
+            <a:r>
+              <a:rPr sz="2800" b="1" i="0">
                 <a:solidFill>
                   <a:srgbClr val="1E2761"/>
                 </a:solidFill>
                 <a:latin typeface="Cambria"/>
               </a:rPr>
-              <a:t>Data Calendar &amp; Watch</a:t>
-            </a:r>
-          </a:p>
-        </p:txBody>
-      </p:sp>
-      <p:sp>
-        <p:nvSpPr>
-          <p:cNvPr id="6" name="TextBox 5"/>
-          <p:cNvSpPr txBox="1"/>
-          <p:nvPr/>
-        </p:nvSpPr>
-        <p:spPr>
-          <a:xfrm>
-            <a:off x="457200" y="6455664"/>
-            <a:ext cx="5486400" cy="274320"/>
-          </a:xfrm>
-          <a:prstGeom prst="rect">
-            <a:avLst/>
-          </a:prstGeom>
-          <a:noFill/>
-        </p:spPr>
-        <p:txBody>
-          <a:bodyPr wrap="square" anchor="t" lIns="25400" rIns="25400" tIns="12700" bIns="12700">
-            <a:spAutoFit/>
-          </a:bodyPr>
-          <a:lstStyle/>
-          <a:p>
-            <a:pPr algn="l"/>
-            <a:r>
-              <a:rPr sz="900" b="0" i="0">
-                <a:solidFill>
-                  <a:srgbClr val="6B7280"/>
-                </a:solidFill>
-                <a:latin typeface="Calibri"/>
-              </a:rPr>
-              <a:t>Bangladesh Macro Weekly  -  week ending July 04, 2026</a:t>
-            </a:r>
-          </a:p>
-        </p:txBody>
-      </p:sp>
-      <p:sp>
-        <p:nvSpPr>
-          <p:cNvPr id="7" name="TextBox 6"/>
-          <p:cNvSpPr txBox="1"/>
-          <p:nvPr/>
-        </p:nvSpPr>
-        <p:spPr>
-          <a:xfrm>
-            <a:off x="10058400" y="6455664"/>
-            <a:ext cx="1673352" cy="274320"/>
-          </a:xfrm>
-          <a:prstGeom prst="rect">
-            <a:avLst/>
-          </a:prstGeom>
-          <a:noFill/>
-        </p:spPr>
-        <p:txBody>
-          <a:bodyPr wrap="square" anchor="t" lIns="25400" rIns="25400" tIns="12700" bIns="12700">
-            <a:spAutoFit/>
-          </a:bodyPr>
-          <a:lstStyle/>
-          <a:p>
-            <a:pPr algn="r"/>
-            <a:r>
-              <a:rPr sz="900" b="0" i="0">
-                <a:solidFill>
-                  <a:srgbClr val="6B7280"/>
-                </a:solidFill>
-                <a:latin typeface="Calibri"/>
-              </a:rPr>
-              <a:t>Internal Usage Only</a:t>
-            </a:r>
-          </a:p>
-        </p:txBody>
-      </p:sp>
-      <p:sp>
-        <p:nvSpPr>
-          <p:cNvPr id="8" name="TextBox 7"/>
-          <p:cNvSpPr txBox="1"/>
-          <p:nvPr/>
-        </p:nvSpPr>
-        <p:spPr>
-          <a:xfrm>
-            <a:off x="5852160" y="6455664"/>
-            <a:ext cx="457200" cy="274320"/>
-          </a:xfrm>
-          <a:prstGeom prst="rect">
-            <a:avLst/>
-          </a:prstGeom>
-          <a:noFill/>
-        </p:spPr>
-        <p:txBody>
-          <a:bodyPr wrap="square" anchor="t" lIns="25400" rIns="25400" tIns="12700" bIns="12700">
-            <a:spAutoFit/>
-          </a:bodyPr>
-          <a:lstStyle/>
-          <a:p>
-            <a:pPr algn="ctr"/>
-            <a:r>
-              <a:rPr sz="900" b="0" i="0">
-                <a:solidFill>
-                  <a:srgbClr val="6B7280"/>
-                </a:solidFill>
-                <a:latin typeface="Calibri"/>
-              </a:rPr>
-              <a:t>11</a:t>
-            </a:r>
-          </a:p>
-        </p:txBody>
-      </p:sp>
-      <p:sp>
-        <p:nvSpPr>
-          <p:cNvPr id="9" name="Rounded Rectangle 8"/>
+              <a:t>Bangladesh Bank Monetary Policy Statement (H1 FY27) — Summary (continued)</a:t>
+            </a:r>
+          </a:p>
+        </p:txBody>
+      </p:sp>
+      <p:sp>
+        <p:nvSpPr>
+          <p:cNvPr id="6" name="Rounded Rectangle 5"/>
           <p:cNvSpPr/>
           <p:nvPr/>
         </p:nvSpPr>
         <p:spPr>
           <a:xfrm>
-            <a:off x="457200" y="1645920"/>
-            <a:ext cx="11274552" cy="566928"/>
+            <a:off x="457200" y="1783080"/>
+            <a:ext cx="11274552" cy="1580083"/>
           </a:xfrm>
           <a:prstGeom prst="roundRect">
             <a:avLst/>
           </a:prstGeom>
           <a:solidFill>
-            <a:srgbClr val="EEF3FC"/>
+            <a:srgbClr val="12163A"/>
           </a:solidFill>
-          <a:ln w="9525">
-            <a:solidFill>
-              <a:srgbClr val="DDE2EC"/>
-            </a:solidFill>
+          <a:ln>
+            <a:noFill/>
           </a:ln>
           <a:effectLst/>
         </p:spPr>
@@ -8691,95 +8515,23 @@
       </p:sp>
       <p:sp>
         <p:nvSpPr>
-          <p:cNvPr id="10" name="TextBox 9"/>
-          <p:cNvSpPr txBox="1"/>
-          <p:nvPr/>
-        </p:nvSpPr>
-        <p:spPr>
-          <a:xfrm>
-            <a:off x="685800" y="1764792"/>
-            <a:ext cx="2377440" cy="365760"/>
-          </a:xfrm>
-          <a:prstGeom prst="rect">
-            <a:avLst/>
-          </a:prstGeom>
-          <a:noFill/>
-        </p:spPr>
-        <p:txBody>
-          <a:bodyPr wrap="square" anchor="t" lIns="25400" rIns="25400" tIns="12700" bIns="12700">
-            <a:spAutoFit/>
-          </a:bodyPr>
-          <a:lstStyle/>
-          <a:p>
-            <a:pPr algn="l"/>
-            <a:r>
-              <a:rPr sz="1300" b="1" i="0">
-                <a:solidFill>
-                  <a:srgbClr val="C9A227"/>
-                </a:solidFill>
-                <a:latin typeface="Calibri"/>
-              </a:rPr>
-              <a:t>Early Jul</a:t>
-            </a:r>
-          </a:p>
-        </p:txBody>
-      </p:sp>
-      <p:sp>
-        <p:nvSpPr>
-          <p:cNvPr id="11" name="TextBox 10"/>
-          <p:cNvSpPr txBox="1"/>
-          <p:nvPr/>
-        </p:nvSpPr>
-        <p:spPr>
-          <a:xfrm>
-            <a:off x="3108960" y="1764792"/>
-            <a:ext cx="8412480" cy="365760"/>
-          </a:xfrm>
-          <a:prstGeom prst="rect">
-            <a:avLst/>
-          </a:prstGeom>
-          <a:noFill/>
-        </p:spPr>
-        <p:txBody>
-          <a:bodyPr wrap="square" anchor="t" lIns="25400" rIns="25400" tIns="12700" bIns="12700">
-            <a:spAutoFit/>
-          </a:bodyPr>
-          <a:lstStyle/>
-          <a:p>
-            <a:pPr algn="l"/>
-            <a:r>
-              <a:rPr sz="1300" b="0" i="0">
-                <a:solidFill>
-                  <a:srgbClr val="23273B"/>
-                </a:solidFill>
-                <a:latin typeface="Calibri"/>
-              </a:rPr>
-              <a:t>BBS - June &amp; FY26 CPI inflation (point-to-point and 12-month average)</a:t>
-            </a:r>
-          </a:p>
-        </p:txBody>
-      </p:sp>
-      <p:sp>
-        <p:nvSpPr>
-          <p:cNvPr id="12" name="Rounded Rectangle 11"/>
+          <p:cNvPr id="7" name="Rectangle 6"/>
           <p:cNvSpPr/>
           <p:nvPr/>
         </p:nvSpPr>
         <p:spPr>
           <a:xfrm>
-            <a:off x="457200" y="2304288"/>
-            <a:ext cx="11274552" cy="566928"/>
-          </a:xfrm>
-          <a:prstGeom prst="roundRect">
+            <a:off x="457200" y="1783080"/>
+            <a:ext cx="109728" cy="1580083"/>
+          </a:xfrm>
+          <a:prstGeom prst="rect">
             <a:avLst/>
           </a:prstGeom>
           <a:solidFill>
-            <a:srgbClr val="FFFFFF"/>
+            <a:srgbClr val="C9A227"/>
           </a:solidFill>
-          <a:ln w="9525">
-            <a:solidFill>
-              <a:srgbClr val="DDE2EC"/>
-            </a:solidFill>
+          <a:ln>
+            <a:noFill/>
           </a:ln>
           <a:effectLst/>
         </p:spPr>
@@ -8807,534 +8559,175 @@
       </p:sp>
       <p:sp>
         <p:nvSpPr>
-          <p:cNvPr id="13" name="TextBox 12"/>
-          <p:cNvSpPr txBox="1"/>
-          <p:nvPr/>
-        </p:nvSpPr>
-        <p:spPr>
-          <a:xfrm>
-            <a:off x="685800" y="2423160"/>
-            <a:ext cx="2377440" cy="365760"/>
-          </a:xfrm>
-          <a:prstGeom prst="rect">
-            <a:avLst/>
-          </a:prstGeom>
-          <a:noFill/>
-        </p:spPr>
-        <p:txBody>
-          <a:bodyPr wrap="square" anchor="t" lIns="25400" rIns="25400" tIns="12700" bIns="12700">
-            <a:spAutoFit/>
-          </a:bodyPr>
-          <a:lstStyle/>
-          <a:p>
-            <a:pPr algn="l"/>
-            <a:r>
-              <a:rPr sz="1300" b="1" i="0">
+          <p:cNvPr id="8" name="TextBox 7"/>
+          <p:cNvSpPr txBox="1"/>
+          <p:nvPr/>
+        </p:nvSpPr>
+        <p:spPr>
+          <a:xfrm>
+            <a:off x="822960" y="1984248"/>
+            <a:ext cx="10058400" cy="274320"/>
+          </a:xfrm>
+          <a:prstGeom prst="rect">
+            <a:avLst/>
+          </a:prstGeom>
+          <a:noFill/>
+        </p:spPr>
+        <p:txBody>
+          <a:bodyPr wrap="square" anchor="t" lIns="25400" rIns="25400" tIns="12700" bIns="12700">
+            <a:spAutoFit/>
+          </a:bodyPr>
+          <a:lstStyle/>
+          <a:p>
+            <a:pPr algn="l"/>
+            <a:r>
+              <a:rPr sz="1100" b="1" i="0">
                 <a:solidFill>
                   <a:srgbClr val="C9A227"/>
                 </a:solidFill>
                 <a:latin typeface="Calibri"/>
               </a:rPr>
-              <a:t>Early Jul</a:t>
-            </a:r>
-          </a:p>
-        </p:txBody>
-      </p:sp>
-      <p:sp>
-        <p:nvSpPr>
-          <p:cNvPr id="14" name="TextBox 13"/>
-          <p:cNvSpPr txBox="1"/>
-          <p:nvPr/>
-        </p:nvSpPr>
-        <p:spPr>
-          <a:xfrm>
-            <a:off x="3108960" y="2423160"/>
-            <a:ext cx="8412480" cy="365760"/>
-          </a:xfrm>
-          <a:prstGeom prst="rect">
-            <a:avLst/>
-          </a:prstGeom>
-          <a:noFill/>
-        </p:spPr>
-        <p:txBody>
-          <a:bodyPr wrap="square" anchor="t" lIns="25400" rIns="25400" tIns="12700" bIns="12700">
-            <a:spAutoFit/>
-          </a:bodyPr>
-          <a:lstStyle/>
-          <a:p>
-            <a:pPr algn="l"/>
-            <a:r>
-              <a:rPr sz="1300" b="0" i="0">
-                <a:solidFill>
-                  <a:srgbClr val="23273B"/>
-                </a:solidFill>
-                <a:latin typeface="Calibri"/>
-              </a:rPr>
-              <a:t>Bangladesh Bank - month-end gross &amp; BPM6 reserves; FY26 remittance total</a:t>
-            </a:r>
-          </a:p>
-        </p:txBody>
-      </p:sp>
-      <p:sp>
-        <p:nvSpPr>
-          <p:cNvPr id="15" name="Rounded Rectangle 14"/>
-          <p:cNvSpPr/>
-          <p:nvPr/>
-        </p:nvSpPr>
-        <p:spPr>
-          <a:xfrm>
-            <a:off x="457200" y="2962656"/>
-            <a:ext cx="11274552" cy="566928"/>
-          </a:xfrm>
-          <a:prstGeom prst="roundRect">
-            <a:avLst/>
-          </a:prstGeom>
-          <a:solidFill>
-            <a:srgbClr val="EEF3FC"/>
-          </a:solidFill>
-          <a:ln w="9525">
-            <a:solidFill>
-              <a:srgbClr val="DDE2EC"/>
-            </a:solidFill>
-          </a:ln>
-          <a:effectLst/>
-        </p:spPr>
-        <p:style>
-          <a:lnRef idx="1">
-            <a:schemeClr val="accent1"/>
-          </a:lnRef>
-          <a:fillRef idx="3">
-            <a:schemeClr val="accent1"/>
-          </a:fillRef>
-          <a:effectRef idx="2">
-            <a:schemeClr val="accent1"/>
-          </a:effectRef>
-          <a:fontRef idx="minor">
-            <a:schemeClr val="lt1"/>
-          </a:fontRef>
-        </p:style>
-        <p:txBody>
-          <a:bodyPr rtlCol="0" anchor="ctr"/>
-          <a:lstStyle/>
-          <a:p>
-            <a:pPr algn="ctr"/>
-          </a:p>
-        </p:txBody>
-      </p:sp>
-      <p:sp>
-        <p:nvSpPr>
-          <p:cNvPr id="16" name="TextBox 15"/>
-          <p:cNvSpPr txBox="1"/>
-          <p:nvPr/>
-        </p:nvSpPr>
-        <p:spPr>
-          <a:xfrm>
-            <a:off x="685800" y="3081528"/>
-            <a:ext cx="2377440" cy="365760"/>
-          </a:xfrm>
-          <a:prstGeom prst="rect">
-            <a:avLst/>
-          </a:prstGeom>
-          <a:noFill/>
-        </p:spPr>
-        <p:txBody>
-          <a:bodyPr wrap="square" anchor="t" lIns="25400" rIns="25400" tIns="12700" bIns="12700">
-            <a:spAutoFit/>
-          </a:bodyPr>
-          <a:lstStyle/>
-          <a:p>
-            <a:pPr algn="l"/>
-            <a:r>
-              <a:rPr sz="1300" b="1" i="0">
+              <a:t>ANALYST BRIEFING</a:t>
+            </a:r>
+          </a:p>
+        </p:txBody>
+      </p:sp>
+      <p:sp>
+        <p:nvSpPr>
+          <p:cNvPr id="9" name="TextBox 8"/>
+          <p:cNvSpPr txBox="1"/>
+          <p:nvPr/>
+        </p:nvSpPr>
+        <p:spPr>
+          <a:xfrm>
+            <a:off x="822960" y="2441448"/>
+            <a:ext cx="274320" cy="365760"/>
+          </a:xfrm>
+          <a:prstGeom prst="rect">
+            <a:avLst/>
+          </a:prstGeom>
+          <a:noFill/>
+        </p:spPr>
+        <p:txBody>
+          <a:bodyPr wrap="square" anchor="t" lIns="25400" rIns="25400" tIns="12700" bIns="12700">
+            <a:spAutoFit/>
+          </a:bodyPr>
+          <a:lstStyle/>
+          <a:p>
+            <a:pPr algn="l"/>
+            <a:r>
+              <a:rPr sz="1200" b="0" i="0">
                 <a:solidFill>
                   <a:srgbClr val="C9A227"/>
                 </a:solidFill>
                 <a:latin typeface="Calibri"/>
               </a:rPr>
-              <a:t>Mid Jul</a:t>
-            </a:r>
-          </a:p>
-        </p:txBody>
-      </p:sp>
-      <p:sp>
-        <p:nvSpPr>
-          <p:cNvPr id="17" name="TextBox 16"/>
-          <p:cNvSpPr txBox="1"/>
-          <p:nvPr/>
-        </p:nvSpPr>
-        <p:spPr>
-          <a:xfrm>
-            <a:off x="3108960" y="3081528"/>
-            <a:ext cx="8412480" cy="365760"/>
-          </a:xfrm>
-          <a:prstGeom prst="rect">
-            <a:avLst/>
-          </a:prstGeom>
-          <a:noFill/>
-        </p:spPr>
-        <p:txBody>
-          <a:bodyPr wrap="square" anchor="t" lIns="25400" rIns="25400" tIns="12700" bIns="12700">
-            <a:spAutoFit/>
-          </a:bodyPr>
-          <a:lstStyle/>
-          <a:p>
-            <a:pPr algn="l"/>
-            <a:r>
-              <a:rPr sz="1300" b="0" i="0">
-                <a:solidFill>
-                  <a:srgbClr val="23273B"/>
-                </a:solidFill>
-                <a:latin typeface="Calibri"/>
-              </a:rPr>
-              <a:t>EPB - June &amp; FY26 export earnings and the trade balance</a:t>
-            </a:r>
-          </a:p>
-        </p:txBody>
-      </p:sp>
-      <p:sp>
-        <p:nvSpPr>
-          <p:cNvPr id="18" name="Rounded Rectangle 17"/>
-          <p:cNvSpPr/>
-          <p:nvPr/>
-        </p:nvSpPr>
-        <p:spPr>
-          <a:xfrm>
-            <a:off x="457200" y="3621024"/>
-            <a:ext cx="11274552" cy="566928"/>
-          </a:xfrm>
-          <a:prstGeom prst="roundRect">
-            <a:avLst/>
-          </a:prstGeom>
-          <a:solidFill>
-            <a:srgbClr val="FFFFFF"/>
-          </a:solidFill>
-          <a:ln w="9525">
-            <a:solidFill>
-              <a:srgbClr val="DDE2EC"/>
-            </a:solidFill>
-          </a:ln>
-          <a:effectLst/>
-        </p:spPr>
-        <p:style>
-          <a:lnRef idx="1">
-            <a:schemeClr val="accent1"/>
-          </a:lnRef>
-          <a:fillRef idx="3">
-            <a:schemeClr val="accent1"/>
-          </a:fillRef>
-          <a:effectRef idx="2">
-            <a:schemeClr val="accent1"/>
-          </a:effectRef>
-          <a:fontRef idx="minor">
-            <a:schemeClr val="lt1"/>
-          </a:fontRef>
-        </p:style>
-        <p:txBody>
-          <a:bodyPr rtlCol="0" anchor="ctr"/>
-          <a:lstStyle/>
-          <a:p>
-            <a:pPr algn="ctr"/>
-          </a:p>
-        </p:txBody>
-      </p:sp>
-      <p:sp>
-        <p:nvSpPr>
-          <p:cNvPr id="19" name="TextBox 18"/>
-          <p:cNvSpPr txBox="1"/>
-          <p:nvPr/>
-        </p:nvSpPr>
-        <p:spPr>
-          <a:xfrm>
-            <a:off x="685800" y="3739896"/>
-            <a:ext cx="2377440" cy="365760"/>
-          </a:xfrm>
-          <a:prstGeom prst="rect">
-            <a:avLst/>
-          </a:prstGeom>
-          <a:noFill/>
-        </p:spPr>
-        <p:txBody>
-          <a:bodyPr wrap="square" anchor="t" lIns="25400" rIns="25400" tIns="12700" bIns="12700">
-            <a:spAutoFit/>
-          </a:bodyPr>
-          <a:lstStyle/>
-          <a:p>
-            <a:pPr algn="l"/>
-            <a:r>
-              <a:rPr sz="1300" b="1" i="0">
-                <a:solidFill>
-                  <a:srgbClr val="C9A227"/>
-                </a:solidFill>
-                <a:latin typeface="Calibri"/>
-              </a:rPr>
-              <a:t>Weekly</a:t>
-            </a:r>
-          </a:p>
-        </p:txBody>
-      </p:sp>
-      <p:sp>
-        <p:nvSpPr>
-          <p:cNvPr id="20" name="TextBox 19"/>
-          <p:cNvSpPr txBox="1"/>
-          <p:nvPr/>
-        </p:nvSpPr>
-        <p:spPr>
-          <a:xfrm>
-            <a:off x="3108960" y="3739896"/>
-            <a:ext cx="8412480" cy="365760"/>
-          </a:xfrm>
-          <a:prstGeom prst="rect">
-            <a:avLst/>
-          </a:prstGeom>
-          <a:noFill/>
-        </p:spPr>
-        <p:txBody>
-          <a:bodyPr wrap="square" anchor="t" lIns="25400" rIns="25400" tIns="12700" bIns="12700">
-            <a:spAutoFit/>
-          </a:bodyPr>
-          <a:lstStyle/>
-          <a:p>
-            <a:pPr algn="l"/>
-            <a:r>
-              <a:rPr sz="1300" b="0" i="0">
-                <a:solidFill>
-                  <a:srgbClr val="23273B"/>
-                </a:solidFill>
-                <a:latin typeface="Calibri"/>
-              </a:rPr>
-              <a:t>Bangladesh Bank - T-bill &amp; T-bond auction cut-off yields</a:t>
-            </a:r>
-          </a:p>
-        </p:txBody>
-      </p:sp>
-      <p:sp>
-        <p:nvSpPr>
-          <p:cNvPr id="21" name="Rounded Rectangle 20"/>
-          <p:cNvSpPr/>
-          <p:nvPr/>
-        </p:nvSpPr>
-        <p:spPr>
-          <a:xfrm>
-            <a:off x="457200" y="4279392"/>
-            <a:ext cx="11274552" cy="566928"/>
-          </a:xfrm>
-          <a:prstGeom prst="roundRect">
-            <a:avLst/>
-          </a:prstGeom>
-          <a:solidFill>
-            <a:srgbClr val="EEF3FC"/>
-          </a:solidFill>
-          <a:ln w="9525">
-            <a:solidFill>
-              <a:srgbClr val="DDE2EC"/>
-            </a:solidFill>
-          </a:ln>
-          <a:effectLst/>
-        </p:spPr>
-        <p:style>
-          <a:lnRef idx="1">
-            <a:schemeClr val="accent1"/>
-          </a:lnRef>
-          <a:fillRef idx="3">
-            <a:schemeClr val="accent1"/>
-          </a:fillRef>
-          <a:effectRef idx="2">
-            <a:schemeClr val="accent1"/>
-          </a:effectRef>
-          <a:fontRef idx="minor">
-            <a:schemeClr val="lt1"/>
-          </a:fontRef>
-        </p:style>
-        <p:txBody>
-          <a:bodyPr rtlCol="0" anchor="ctr"/>
-          <a:lstStyle/>
-          <a:p>
-            <a:pPr algn="ctr"/>
-          </a:p>
-        </p:txBody>
-      </p:sp>
-      <p:sp>
-        <p:nvSpPr>
-          <p:cNvPr id="22" name="TextBox 21"/>
-          <p:cNvSpPr txBox="1"/>
-          <p:nvPr/>
-        </p:nvSpPr>
-        <p:spPr>
-          <a:xfrm>
-            <a:off x="685800" y="4398264"/>
-            <a:ext cx="2377440" cy="365760"/>
-          </a:xfrm>
-          <a:prstGeom prst="rect">
-            <a:avLst/>
-          </a:prstGeom>
-          <a:noFill/>
-        </p:spPr>
-        <p:txBody>
-          <a:bodyPr wrap="square" anchor="t" lIns="25400" rIns="25400" tIns="12700" bIns="12700">
-            <a:spAutoFit/>
-          </a:bodyPr>
-          <a:lstStyle/>
-          <a:p>
-            <a:pPr algn="l"/>
-            <a:r>
-              <a:rPr sz="1300" b="1" i="0">
-                <a:solidFill>
-                  <a:srgbClr val="C9A227"/>
-                </a:solidFill>
-                <a:latin typeface="Calibri"/>
-              </a:rPr>
-              <a:t>Jul</a:t>
-            </a:r>
-          </a:p>
-        </p:txBody>
-      </p:sp>
-      <p:sp>
-        <p:nvSpPr>
-          <p:cNvPr id="23" name="TextBox 22"/>
-          <p:cNvSpPr txBox="1"/>
-          <p:nvPr/>
-        </p:nvSpPr>
-        <p:spPr>
-          <a:xfrm>
-            <a:off x="3108960" y="4398264"/>
-            <a:ext cx="8412480" cy="365760"/>
-          </a:xfrm>
-          <a:prstGeom prst="rect">
-            <a:avLst/>
-          </a:prstGeom>
-          <a:noFill/>
-        </p:spPr>
-        <p:txBody>
-          <a:bodyPr wrap="square" anchor="t" lIns="25400" rIns="25400" tIns="12700" bIns="12700">
-            <a:spAutoFit/>
-          </a:bodyPr>
-          <a:lstStyle/>
-          <a:p>
-            <a:pPr algn="l"/>
-            <a:r>
-              <a:rPr sz="1300" b="0" i="0">
-                <a:solidFill>
-                  <a:srgbClr val="23273B"/>
-                </a:solidFill>
-                <a:latin typeface="Calibri"/>
-              </a:rPr>
-              <a:t>Bangladesh Bank - Monetary Policy Statement for H1 FY27</a:t>
-            </a:r>
-          </a:p>
-        </p:txBody>
-      </p:sp>
-      <p:sp>
-        <p:nvSpPr>
-          <p:cNvPr id="24" name="Rounded Rectangle 23"/>
-          <p:cNvSpPr/>
-          <p:nvPr/>
-        </p:nvSpPr>
-        <p:spPr>
-          <a:xfrm>
-            <a:off x="457200" y="4937759"/>
-            <a:ext cx="11274552" cy="566928"/>
-          </a:xfrm>
-          <a:prstGeom prst="roundRect">
-            <a:avLst/>
-          </a:prstGeom>
-          <a:solidFill>
-            <a:srgbClr val="FFFFFF"/>
-          </a:solidFill>
-          <a:ln w="9525">
-            <a:solidFill>
-              <a:srgbClr val="DDE2EC"/>
-            </a:solidFill>
-          </a:ln>
-          <a:effectLst/>
-        </p:spPr>
-        <p:style>
-          <a:lnRef idx="1">
-            <a:schemeClr val="accent1"/>
-          </a:lnRef>
-          <a:fillRef idx="3">
-            <a:schemeClr val="accent1"/>
-          </a:fillRef>
-          <a:effectRef idx="2">
-            <a:schemeClr val="accent1"/>
-          </a:effectRef>
-          <a:fontRef idx="minor">
-            <a:schemeClr val="lt1"/>
-          </a:fontRef>
-        </p:style>
-        <p:txBody>
-          <a:bodyPr rtlCol="0" anchor="ctr"/>
-          <a:lstStyle/>
-          <a:p>
-            <a:pPr algn="ctr"/>
-          </a:p>
-        </p:txBody>
-      </p:sp>
-      <p:sp>
-        <p:nvSpPr>
-          <p:cNvPr id="25" name="TextBox 24"/>
-          <p:cNvSpPr txBox="1"/>
-          <p:nvPr/>
-        </p:nvSpPr>
-        <p:spPr>
-          <a:xfrm>
-            <a:off x="685800" y="5056631"/>
-            <a:ext cx="2377440" cy="365760"/>
-          </a:xfrm>
-          <a:prstGeom prst="rect">
-            <a:avLst/>
-          </a:prstGeom>
-          <a:noFill/>
-        </p:spPr>
-        <p:txBody>
-          <a:bodyPr wrap="square" anchor="t" lIns="25400" rIns="25400" tIns="12700" bIns="12700">
-            <a:spAutoFit/>
-          </a:bodyPr>
-          <a:lstStyle/>
-          <a:p>
-            <a:pPr algn="l"/>
-            <a:r>
-              <a:rPr sz="1300" b="1" i="0">
-                <a:solidFill>
-                  <a:srgbClr val="C9A227"/>
-                </a:solidFill>
-                <a:latin typeface="Calibri"/>
-              </a:rPr>
-              <a:t>Daily</a:t>
-            </a:r>
-          </a:p>
-        </p:txBody>
-      </p:sp>
-      <p:sp>
-        <p:nvSpPr>
-          <p:cNvPr id="26" name="TextBox 25"/>
-          <p:cNvSpPr txBox="1"/>
-          <p:nvPr/>
-        </p:nvSpPr>
-        <p:spPr>
-          <a:xfrm>
-            <a:off x="3108960" y="5056631"/>
-            <a:ext cx="8412480" cy="365760"/>
-          </a:xfrm>
-          <a:prstGeom prst="rect">
-            <a:avLst/>
-          </a:prstGeom>
-          <a:noFill/>
-        </p:spPr>
-        <p:txBody>
-          <a:bodyPr wrap="square" anchor="t" lIns="25400" rIns="25400" tIns="12700" bIns="12700">
-            <a:spAutoFit/>
-          </a:bodyPr>
-          <a:lstStyle/>
-          <a:p>
-            <a:pPr algn="l"/>
-            <a:r>
-              <a:rPr sz="1300" b="0" i="0">
-                <a:solidFill>
-                  <a:srgbClr val="23273B"/>
-                </a:solidFill>
-                <a:latin typeface="Calibri"/>
-              </a:rPr>
-              <a:t>Global - term SOFR, EURIBOR, gold and Brent crude</a:t>
+              <a:t>◆</a:t>
+            </a:r>
+          </a:p>
+        </p:txBody>
+      </p:sp>
+      <p:sp>
+        <p:nvSpPr>
+          <p:cNvPr id="10" name="TextBox 9"/>
+          <p:cNvSpPr txBox="1"/>
+          <p:nvPr/>
+        </p:nvSpPr>
+        <p:spPr>
+          <a:xfrm>
+            <a:off x="1143000" y="2441448"/>
+            <a:ext cx="10241280" cy="848563"/>
+          </a:xfrm>
+          <a:prstGeom prst="rect">
+            <a:avLst/>
+          </a:prstGeom>
+          <a:noFill/>
+        </p:spPr>
+        <p:txBody>
+          <a:bodyPr wrap="square" anchor="t" lIns="25400" rIns="25400" tIns="12700" bIns="12700">
+            <a:spAutoFit/>
+          </a:bodyPr>
+          <a:lstStyle/>
+          <a:p>
+            <a:pPr algn="l"/>
+            <a:r>
+              <a:rPr sz="1400" b="0" i="0">
+                <a:solidFill>
+                  <a:srgbClr val="CADCFC"/>
+                </a:solidFill>
+                <a:latin typeface="Calibri"/>
+              </a:rPr>
+              <a:t>Key risks: Middle East conflict, energy/fertilizer price shocks, high NPLs, weak private investment</a:t>
+            </a:r>
+          </a:p>
+        </p:txBody>
+      </p:sp>
+      <p:sp>
+        <p:nvSpPr>
+          <p:cNvPr id="11" name="TextBox 10"/>
+          <p:cNvSpPr txBox="1"/>
+          <p:nvPr/>
+        </p:nvSpPr>
+        <p:spPr>
+          <a:xfrm>
+            <a:off x="457200" y="6455664"/>
+            <a:ext cx="5486400" cy="274320"/>
+          </a:xfrm>
+          <a:prstGeom prst="rect">
+            <a:avLst/>
+          </a:prstGeom>
+          <a:noFill/>
+        </p:spPr>
+        <p:txBody>
+          <a:bodyPr wrap="square" anchor="t" lIns="25400" rIns="25400" tIns="12700" bIns="12700">
+            <a:spAutoFit/>
+          </a:bodyPr>
+          <a:lstStyle/>
+          <a:p>
+            <a:pPr algn="l"/>
+            <a:r>
+              <a:rPr sz="900" b="0" i="0">
+                <a:solidFill>
+                  <a:srgbClr val="6B7280"/>
+                </a:solidFill>
+                <a:latin typeface="Calibri"/>
+              </a:rPr>
+              <a:t>Bangladesh Macro Weekly  -  week ending July 04, 2026</a:t>
+            </a:r>
+          </a:p>
+        </p:txBody>
+      </p:sp>
+      <p:sp>
+        <p:nvSpPr>
+          <p:cNvPr id="12" name="TextBox 11"/>
+          <p:cNvSpPr txBox="1"/>
+          <p:nvPr/>
+        </p:nvSpPr>
+        <p:spPr>
+          <a:xfrm>
+            <a:off x="10058400" y="6455664"/>
+            <a:ext cx="1673352" cy="274320"/>
+          </a:xfrm>
+          <a:prstGeom prst="rect">
+            <a:avLst/>
+          </a:prstGeom>
+          <a:noFill/>
+        </p:spPr>
+        <p:txBody>
+          <a:bodyPr wrap="square" anchor="t" lIns="25400" rIns="25400" tIns="12700" bIns="12700">
+            <a:spAutoFit/>
+          </a:bodyPr>
+          <a:lstStyle/>
+          <a:p>
+            <a:pPr algn="r"/>
+            <a:r>
+              <a:rPr sz="900" b="0" i="0">
+                <a:solidFill>
+                  <a:srgbClr val="6B7280"/>
+                </a:solidFill>
+                <a:latin typeface="Calibri"/>
+              </a:rPr>
+              <a:t>Internal Usage Only</a:t>
             </a:r>
           </a:p>
         </p:txBody>
@@ -9372,6 +8765,982 @@
             <a:avLst/>
           </a:prstGeom>
           <a:solidFill>
+            <a:srgbClr val="FFFFFF"/>
+          </a:solidFill>
+          <a:ln>
+            <a:noFill/>
+          </a:ln>
+          <a:effectLst/>
+        </p:spPr>
+        <p:style>
+          <a:lnRef idx="1">
+            <a:schemeClr val="accent1"/>
+          </a:lnRef>
+          <a:fillRef idx="3">
+            <a:schemeClr val="accent1"/>
+          </a:fillRef>
+          <a:effectRef idx="2">
+            <a:schemeClr val="accent1"/>
+          </a:effectRef>
+          <a:fontRef idx="minor">
+            <a:schemeClr val="lt1"/>
+          </a:fontRef>
+        </p:style>
+        <p:txBody>
+          <a:bodyPr rtlCol="0" anchor="ctr"/>
+          <a:lstStyle/>
+          <a:p>
+            <a:pPr algn="ctr"/>
+          </a:p>
+        </p:txBody>
+      </p:sp>
+      <p:sp>
+        <p:nvSpPr>
+          <p:cNvPr id="3" name="Oval 2"/>
+          <p:cNvSpPr/>
+          <p:nvPr/>
+        </p:nvSpPr>
+        <p:spPr>
+          <a:xfrm>
+            <a:off x="457200" y="566928"/>
+            <a:ext cx="146304" cy="146304"/>
+          </a:xfrm>
+          <a:prstGeom prst="ellipse">
+            <a:avLst/>
+          </a:prstGeom>
+          <a:solidFill>
+            <a:srgbClr val="C9A227"/>
+          </a:solidFill>
+          <a:ln>
+            <a:noFill/>
+          </a:ln>
+        </p:spPr>
+        <p:style>
+          <a:lnRef idx="1">
+            <a:schemeClr val="accent1"/>
+          </a:lnRef>
+          <a:fillRef idx="3">
+            <a:schemeClr val="accent1"/>
+          </a:fillRef>
+          <a:effectRef idx="2">
+            <a:schemeClr val="accent1"/>
+          </a:effectRef>
+          <a:fontRef idx="minor">
+            <a:schemeClr val="lt1"/>
+          </a:fontRef>
+        </p:style>
+        <p:txBody>
+          <a:bodyPr rtlCol="0" anchor="ctr"/>
+          <a:lstStyle/>
+          <a:p>
+            <a:pPr algn="ctr"/>
+          </a:p>
+        </p:txBody>
+      </p:sp>
+      <p:sp>
+        <p:nvSpPr>
+          <p:cNvPr id="4" name="TextBox 3"/>
+          <p:cNvSpPr txBox="1"/>
+          <p:nvPr/>
+        </p:nvSpPr>
+        <p:spPr>
+          <a:xfrm>
+            <a:off x="676656" y="457200"/>
+            <a:ext cx="8229600" cy="310896"/>
+          </a:xfrm>
+          <a:prstGeom prst="rect">
+            <a:avLst/>
+          </a:prstGeom>
+          <a:noFill/>
+        </p:spPr>
+        <p:txBody>
+          <a:bodyPr wrap="square" anchor="t" lIns="25400" rIns="25400" tIns="12700" bIns="12700">
+            <a:spAutoFit/>
+          </a:bodyPr>
+          <a:lstStyle/>
+          <a:p>
+            <a:pPr algn="l"/>
+            <a:r>
+              <a:rPr sz="1200" b="1" i="0">
+                <a:solidFill>
+                  <a:srgbClr val="C9A227"/>
+                </a:solidFill>
+                <a:latin typeface="Calibri"/>
+              </a:rPr>
+              <a:t>LOOKING AHEAD</a:t>
+            </a:r>
+          </a:p>
+        </p:txBody>
+      </p:sp>
+      <p:sp>
+        <p:nvSpPr>
+          <p:cNvPr id="5" name="TextBox 4"/>
+          <p:cNvSpPr txBox="1"/>
+          <p:nvPr/>
+        </p:nvSpPr>
+        <p:spPr>
+          <a:xfrm>
+            <a:off x="438912" y="768096"/>
+            <a:ext cx="11155680" cy="640080"/>
+          </a:xfrm>
+          <a:prstGeom prst="rect">
+            <a:avLst/>
+          </a:prstGeom>
+          <a:noFill/>
+        </p:spPr>
+        <p:txBody>
+          <a:bodyPr wrap="square" anchor="t" lIns="25400" rIns="25400" tIns="12700" bIns="12700">
+            <a:spAutoFit/>
+          </a:bodyPr>
+          <a:lstStyle/>
+          <a:p>
+            <a:pPr algn="l"/>
+            <a:r>
+              <a:rPr sz="3000" b="1" i="0">
+                <a:solidFill>
+                  <a:srgbClr val="1E2761"/>
+                </a:solidFill>
+                <a:latin typeface="Cambria"/>
+              </a:rPr>
+              <a:t>Data Calendar &amp; Watch</a:t>
+            </a:r>
+          </a:p>
+        </p:txBody>
+      </p:sp>
+      <p:sp>
+        <p:nvSpPr>
+          <p:cNvPr id="6" name="TextBox 5"/>
+          <p:cNvSpPr txBox="1"/>
+          <p:nvPr/>
+        </p:nvSpPr>
+        <p:spPr>
+          <a:xfrm>
+            <a:off x="457200" y="6455664"/>
+            <a:ext cx="5486400" cy="274320"/>
+          </a:xfrm>
+          <a:prstGeom prst="rect">
+            <a:avLst/>
+          </a:prstGeom>
+          <a:noFill/>
+        </p:spPr>
+        <p:txBody>
+          <a:bodyPr wrap="square" anchor="t" lIns="25400" rIns="25400" tIns="12700" bIns="12700">
+            <a:spAutoFit/>
+          </a:bodyPr>
+          <a:lstStyle/>
+          <a:p>
+            <a:pPr algn="l"/>
+            <a:r>
+              <a:rPr sz="900" b="0" i="0">
+                <a:solidFill>
+                  <a:srgbClr val="6B7280"/>
+                </a:solidFill>
+                <a:latin typeface="Calibri"/>
+              </a:rPr>
+              <a:t>Bangladesh Macro Weekly  -  week ending July 04, 2026</a:t>
+            </a:r>
+          </a:p>
+        </p:txBody>
+      </p:sp>
+      <p:sp>
+        <p:nvSpPr>
+          <p:cNvPr id="7" name="TextBox 6"/>
+          <p:cNvSpPr txBox="1"/>
+          <p:nvPr/>
+        </p:nvSpPr>
+        <p:spPr>
+          <a:xfrm>
+            <a:off x="10058400" y="6455664"/>
+            <a:ext cx="1673352" cy="274320"/>
+          </a:xfrm>
+          <a:prstGeom prst="rect">
+            <a:avLst/>
+          </a:prstGeom>
+          <a:noFill/>
+        </p:spPr>
+        <p:txBody>
+          <a:bodyPr wrap="square" anchor="t" lIns="25400" rIns="25400" tIns="12700" bIns="12700">
+            <a:spAutoFit/>
+          </a:bodyPr>
+          <a:lstStyle/>
+          <a:p>
+            <a:pPr algn="r"/>
+            <a:r>
+              <a:rPr sz="900" b="0" i="0">
+                <a:solidFill>
+                  <a:srgbClr val="6B7280"/>
+                </a:solidFill>
+                <a:latin typeface="Calibri"/>
+              </a:rPr>
+              <a:t>Internal Usage Only</a:t>
+            </a:r>
+          </a:p>
+        </p:txBody>
+      </p:sp>
+      <p:sp>
+        <p:nvSpPr>
+          <p:cNvPr id="8" name="TextBox 7"/>
+          <p:cNvSpPr txBox="1"/>
+          <p:nvPr/>
+        </p:nvSpPr>
+        <p:spPr>
+          <a:xfrm>
+            <a:off x="5852160" y="6455664"/>
+            <a:ext cx="457200" cy="274320"/>
+          </a:xfrm>
+          <a:prstGeom prst="rect">
+            <a:avLst/>
+          </a:prstGeom>
+          <a:noFill/>
+        </p:spPr>
+        <p:txBody>
+          <a:bodyPr wrap="square" anchor="t" lIns="25400" rIns="25400" tIns="12700" bIns="12700">
+            <a:spAutoFit/>
+          </a:bodyPr>
+          <a:lstStyle/>
+          <a:p>
+            <a:pPr algn="ctr"/>
+            <a:r>
+              <a:rPr sz="900" b="0" i="0">
+                <a:solidFill>
+                  <a:srgbClr val="6B7280"/>
+                </a:solidFill>
+                <a:latin typeface="Calibri"/>
+              </a:rPr>
+              <a:t>11</a:t>
+            </a:r>
+          </a:p>
+        </p:txBody>
+      </p:sp>
+      <p:sp>
+        <p:nvSpPr>
+          <p:cNvPr id="9" name="Rounded Rectangle 8"/>
+          <p:cNvSpPr/>
+          <p:nvPr/>
+        </p:nvSpPr>
+        <p:spPr>
+          <a:xfrm>
+            <a:off x="457200" y="1645920"/>
+            <a:ext cx="11274552" cy="566928"/>
+          </a:xfrm>
+          <a:prstGeom prst="roundRect">
+            <a:avLst/>
+          </a:prstGeom>
+          <a:solidFill>
+            <a:srgbClr val="EEF3FC"/>
+          </a:solidFill>
+          <a:ln w="9525">
+            <a:solidFill>
+              <a:srgbClr val="DDE2EC"/>
+            </a:solidFill>
+          </a:ln>
+          <a:effectLst/>
+        </p:spPr>
+        <p:style>
+          <a:lnRef idx="1">
+            <a:schemeClr val="accent1"/>
+          </a:lnRef>
+          <a:fillRef idx="3">
+            <a:schemeClr val="accent1"/>
+          </a:fillRef>
+          <a:effectRef idx="2">
+            <a:schemeClr val="accent1"/>
+          </a:effectRef>
+          <a:fontRef idx="minor">
+            <a:schemeClr val="lt1"/>
+          </a:fontRef>
+        </p:style>
+        <p:txBody>
+          <a:bodyPr rtlCol="0" anchor="ctr"/>
+          <a:lstStyle/>
+          <a:p>
+            <a:pPr algn="ctr"/>
+          </a:p>
+        </p:txBody>
+      </p:sp>
+      <p:sp>
+        <p:nvSpPr>
+          <p:cNvPr id="10" name="TextBox 9"/>
+          <p:cNvSpPr txBox="1"/>
+          <p:nvPr/>
+        </p:nvSpPr>
+        <p:spPr>
+          <a:xfrm>
+            <a:off x="685800" y="1764792"/>
+            <a:ext cx="2377440" cy="365760"/>
+          </a:xfrm>
+          <a:prstGeom prst="rect">
+            <a:avLst/>
+          </a:prstGeom>
+          <a:noFill/>
+        </p:spPr>
+        <p:txBody>
+          <a:bodyPr wrap="square" anchor="t" lIns="25400" rIns="25400" tIns="12700" bIns="12700">
+            <a:spAutoFit/>
+          </a:bodyPr>
+          <a:lstStyle/>
+          <a:p>
+            <a:pPr algn="l"/>
+            <a:r>
+              <a:rPr sz="1300" b="1" i="0">
+                <a:solidFill>
+                  <a:srgbClr val="C9A227"/>
+                </a:solidFill>
+                <a:latin typeface="Calibri"/>
+              </a:rPr>
+              <a:t>Early Jul</a:t>
+            </a:r>
+          </a:p>
+        </p:txBody>
+      </p:sp>
+      <p:sp>
+        <p:nvSpPr>
+          <p:cNvPr id="11" name="TextBox 10"/>
+          <p:cNvSpPr txBox="1"/>
+          <p:nvPr/>
+        </p:nvSpPr>
+        <p:spPr>
+          <a:xfrm>
+            <a:off x="3108960" y="1764792"/>
+            <a:ext cx="8412480" cy="365760"/>
+          </a:xfrm>
+          <a:prstGeom prst="rect">
+            <a:avLst/>
+          </a:prstGeom>
+          <a:noFill/>
+        </p:spPr>
+        <p:txBody>
+          <a:bodyPr wrap="square" anchor="t" lIns="25400" rIns="25400" tIns="12700" bIns="12700">
+            <a:spAutoFit/>
+          </a:bodyPr>
+          <a:lstStyle/>
+          <a:p>
+            <a:pPr algn="l"/>
+            <a:r>
+              <a:rPr sz="1300" b="0" i="0">
+                <a:solidFill>
+                  <a:srgbClr val="23273B"/>
+                </a:solidFill>
+                <a:latin typeface="Calibri"/>
+              </a:rPr>
+              <a:t>BBS - June &amp; FY26 CPI inflation (point-to-point and 12-month average)</a:t>
+            </a:r>
+          </a:p>
+        </p:txBody>
+      </p:sp>
+      <p:sp>
+        <p:nvSpPr>
+          <p:cNvPr id="12" name="Rounded Rectangle 11"/>
+          <p:cNvSpPr/>
+          <p:nvPr/>
+        </p:nvSpPr>
+        <p:spPr>
+          <a:xfrm>
+            <a:off x="457200" y="2304288"/>
+            <a:ext cx="11274552" cy="566928"/>
+          </a:xfrm>
+          <a:prstGeom prst="roundRect">
+            <a:avLst/>
+          </a:prstGeom>
+          <a:solidFill>
+            <a:srgbClr val="FFFFFF"/>
+          </a:solidFill>
+          <a:ln w="9525">
+            <a:solidFill>
+              <a:srgbClr val="DDE2EC"/>
+            </a:solidFill>
+          </a:ln>
+          <a:effectLst/>
+        </p:spPr>
+        <p:style>
+          <a:lnRef idx="1">
+            <a:schemeClr val="accent1"/>
+          </a:lnRef>
+          <a:fillRef idx="3">
+            <a:schemeClr val="accent1"/>
+          </a:fillRef>
+          <a:effectRef idx="2">
+            <a:schemeClr val="accent1"/>
+          </a:effectRef>
+          <a:fontRef idx="minor">
+            <a:schemeClr val="lt1"/>
+          </a:fontRef>
+        </p:style>
+        <p:txBody>
+          <a:bodyPr rtlCol="0" anchor="ctr"/>
+          <a:lstStyle/>
+          <a:p>
+            <a:pPr algn="ctr"/>
+          </a:p>
+        </p:txBody>
+      </p:sp>
+      <p:sp>
+        <p:nvSpPr>
+          <p:cNvPr id="13" name="TextBox 12"/>
+          <p:cNvSpPr txBox="1"/>
+          <p:nvPr/>
+        </p:nvSpPr>
+        <p:spPr>
+          <a:xfrm>
+            <a:off x="685800" y="2423160"/>
+            <a:ext cx="2377440" cy="365760"/>
+          </a:xfrm>
+          <a:prstGeom prst="rect">
+            <a:avLst/>
+          </a:prstGeom>
+          <a:noFill/>
+        </p:spPr>
+        <p:txBody>
+          <a:bodyPr wrap="square" anchor="t" lIns="25400" rIns="25400" tIns="12700" bIns="12700">
+            <a:spAutoFit/>
+          </a:bodyPr>
+          <a:lstStyle/>
+          <a:p>
+            <a:pPr algn="l"/>
+            <a:r>
+              <a:rPr sz="1300" b="1" i="0">
+                <a:solidFill>
+                  <a:srgbClr val="C9A227"/>
+                </a:solidFill>
+                <a:latin typeface="Calibri"/>
+              </a:rPr>
+              <a:t>Early Jul</a:t>
+            </a:r>
+          </a:p>
+        </p:txBody>
+      </p:sp>
+      <p:sp>
+        <p:nvSpPr>
+          <p:cNvPr id="14" name="TextBox 13"/>
+          <p:cNvSpPr txBox="1"/>
+          <p:nvPr/>
+        </p:nvSpPr>
+        <p:spPr>
+          <a:xfrm>
+            <a:off x="3108960" y="2423160"/>
+            <a:ext cx="8412480" cy="365760"/>
+          </a:xfrm>
+          <a:prstGeom prst="rect">
+            <a:avLst/>
+          </a:prstGeom>
+          <a:noFill/>
+        </p:spPr>
+        <p:txBody>
+          <a:bodyPr wrap="square" anchor="t" lIns="25400" rIns="25400" tIns="12700" bIns="12700">
+            <a:spAutoFit/>
+          </a:bodyPr>
+          <a:lstStyle/>
+          <a:p>
+            <a:pPr algn="l"/>
+            <a:r>
+              <a:rPr sz="1300" b="0" i="0">
+                <a:solidFill>
+                  <a:srgbClr val="23273B"/>
+                </a:solidFill>
+                <a:latin typeface="Calibri"/>
+              </a:rPr>
+              <a:t>Bangladesh Bank - month-end gross &amp; BPM6 reserves; FY26 remittance total</a:t>
+            </a:r>
+          </a:p>
+        </p:txBody>
+      </p:sp>
+      <p:sp>
+        <p:nvSpPr>
+          <p:cNvPr id="15" name="Rounded Rectangle 14"/>
+          <p:cNvSpPr/>
+          <p:nvPr/>
+        </p:nvSpPr>
+        <p:spPr>
+          <a:xfrm>
+            <a:off x="457200" y="2962656"/>
+            <a:ext cx="11274552" cy="566928"/>
+          </a:xfrm>
+          <a:prstGeom prst="roundRect">
+            <a:avLst/>
+          </a:prstGeom>
+          <a:solidFill>
+            <a:srgbClr val="EEF3FC"/>
+          </a:solidFill>
+          <a:ln w="9525">
+            <a:solidFill>
+              <a:srgbClr val="DDE2EC"/>
+            </a:solidFill>
+          </a:ln>
+          <a:effectLst/>
+        </p:spPr>
+        <p:style>
+          <a:lnRef idx="1">
+            <a:schemeClr val="accent1"/>
+          </a:lnRef>
+          <a:fillRef idx="3">
+            <a:schemeClr val="accent1"/>
+          </a:fillRef>
+          <a:effectRef idx="2">
+            <a:schemeClr val="accent1"/>
+          </a:effectRef>
+          <a:fontRef idx="minor">
+            <a:schemeClr val="lt1"/>
+          </a:fontRef>
+        </p:style>
+        <p:txBody>
+          <a:bodyPr rtlCol="0" anchor="ctr"/>
+          <a:lstStyle/>
+          <a:p>
+            <a:pPr algn="ctr"/>
+          </a:p>
+        </p:txBody>
+      </p:sp>
+      <p:sp>
+        <p:nvSpPr>
+          <p:cNvPr id="16" name="TextBox 15"/>
+          <p:cNvSpPr txBox="1"/>
+          <p:nvPr/>
+        </p:nvSpPr>
+        <p:spPr>
+          <a:xfrm>
+            <a:off x="685800" y="3081528"/>
+            <a:ext cx="2377440" cy="365760"/>
+          </a:xfrm>
+          <a:prstGeom prst="rect">
+            <a:avLst/>
+          </a:prstGeom>
+          <a:noFill/>
+        </p:spPr>
+        <p:txBody>
+          <a:bodyPr wrap="square" anchor="t" lIns="25400" rIns="25400" tIns="12700" bIns="12700">
+            <a:spAutoFit/>
+          </a:bodyPr>
+          <a:lstStyle/>
+          <a:p>
+            <a:pPr algn="l"/>
+            <a:r>
+              <a:rPr sz="1300" b="1" i="0">
+                <a:solidFill>
+                  <a:srgbClr val="C9A227"/>
+                </a:solidFill>
+                <a:latin typeface="Calibri"/>
+              </a:rPr>
+              <a:t>Mid Jul</a:t>
+            </a:r>
+          </a:p>
+        </p:txBody>
+      </p:sp>
+      <p:sp>
+        <p:nvSpPr>
+          <p:cNvPr id="17" name="TextBox 16"/>
+          <p:cNvSpPr txBox="1"/>
+          <p:nvPr/>
+        </p:nvSpPr>
+        <p:spPr>
+          <a:xfrm>
+            <a:off x="3108960" y="3081528"/>
+            <a:ext cx="8412480" cy="365760"/>
+          </a:xfrm>
+          <a:prstGeom prst="rect">
+            <a:avLst/>
+          </a:prstGeom>
+          <a:noFill/>
+        </p:spPr>
+        <p:txBody>
+          <a:bodyPr wrap="square" anchor="t" lIns="25400" rIns="25400" tIns="12700" bIns="12700">
+            <a:spAutoFit/>
+          </a:bodyPr>
+          <a:lstStyle/>
+          <a:p>
+            <a:pPr algn="l"/>
+            <a:r>
+              <a:rPr sz="1300" b="0" i="0">
+                <a:solidFill>
+                  <a:srgbClr val="23273B"/>
+                </a:solidFill>
+                <a:latin typeface="Calibri"/>
+              </a:rPr>
+              <a:t>EPB - June &amp; FY26 export earnings and the trade balance</a:t>
+            </a:r>
+          </a:p>
+        </p:txBody>
+      </p:sp>
+      <p:sp>
+        <p:nvSpPr>
+          <p:cNvPr id="18" name="Rounded Rectangle 17"/>
+          <p:cNvSpPr/>
+          <p:nvPr/>
+        </p:nvSpPr>
+        <p:spPr>
+          <a:xfrm>
+            <a:off x="457200" y="3621024"/>
+            <a:ext cx="11274552" cy="566928"/>
+          </a:xfrm>
+          <a:prstGeom prst="roundRect">
+            <a:avLst/>
+          </a:prstGeom>
+          <a:solidFill>
+            <a:srgbClr val="FFFFFF"/>
+          </a:solidFill>
+          <a:ln w="9525">
+            <a:solidFill>
+              <a:srgbClr val="DDE2EC"/>
+            </a:solidFill>
+          </a:ln>
+          <a:effectLst/>
+        </p:spPr>
+        <p:style>
+          <a:lnRef idx="1">
+            <a:schemeClr val="accent1"/>
+          </a:lnRef>
+          <a:fillRef idx="3">
+            <a:schemeClr val="accent1"/>
+          </a:fillRef>
+          <a:effectRef idx="2">
+            <a:schemeClr val="accent1"/>
+          </a:effectRef>
+          <a:fontRef idx="minor">
+            <a:schemeClr val="lt1"/>
+          </a:fontRef>
+        </p:style>
+        <p:txBody>
+          <a:bodyPr rtlCol="0" anchor="ctr"/>
+          <a:lstStyle/>
+          <a:p>
+            <a:pPr algn="ctr"/>
+          </a:p>
+        </p:txBody>
+      </p:sp>
+      <p:sp>
+        <p:nvSpPr>
+          <p:cNvPr id="19" name="TextBox 18"/>
+          <p:cNvSpPr txBox="1"/>
+          <p:nvPr/>
+        </p:nvSpPr>
+        <p:spPr>
+          <a:xfrm>
+            <a:off x="685800" y="3739896"/>
+            <a:ext cx="2377440" cy="365760"/>
+          </a:xfrm>
+          <a:prstGeom prst="rect">
+            <a:avLst/>
+          </a:prstGeom>
+          <a:noFill/>
+        </p:spPr>
+        <p:txBody>
+          <a:bodyPr wrap="square" anchor="t" lIns="25400" rIns="25400" tIns="12700" bIns="12700">
+            <a:spAutoFit/>
+          </a:bodyPr>
+          <a:lstStyle/>
+          <a:p>
+            <a:pPr algn="l"/>
+            <a:r>
+              <a:rPr sz="1300" b="1" i="0">
+                <a:solidFill>
+                  <a:srgbClr val="C9A227"/>
+                </a:solidFill>
+                <a:latin typeface="Calibri"/>
+              </a:rPr>
+              <a:t>Weekly</a:t>
+            </a:r>
+          </a:p>
+        </p:txBody>
+      </p:sp>
+      <p:sp>
+        <p:nvSpPr>
+          <p:cNvPr id="20" name="TextBox 19"/>
+          <p:cNvSpPr txBox="1"/>
+          <p:nvPr/>
+        </p:nvSpPr>
+        <p:spPr>
+          <a:xfrm>
+            <a:off x="3108960" y="3739896"/>
+            <a:ext cx="8412480" cy="365760"/>
+          </a:xfrm>
+          <a:prstGeom prst="rect">
+            <a:avLst/>
+          </a:prstGeom>
+          <a:noFill/>
+        </p:spPr>
+        <p:txBody>
+          <a:bodyPr wrap="square" anchor="t" lIns="25400" rIns="25400" tIns="12700" bIns="12700">
+            <a:spAutoFit/>
+          </a:bodyPr>
+          <a:lstStyle/>
+          <a:p>
+            <a:pPr algn="l"/>
+            <a:r>
+              <a:rPr sz="1300" b="0" i="0">
+                <a:solidFill>
+                  <a:srgbClr val="23273B"/>
+                </a:solidFill>
+                <a:latin typeface="Calibri"/>
+              </a:rPr>
+              <a:t>Bangladesh Bank - T-bill &amp; T-bond auction cut-off yields</a:t>
+            </a:r>
+          </a:p>
+        </p:txBody>
+      </p:sp>
+      <p:sp>
+        <p:nvSpPr>
+          <p:cNvPr id="21" name="Rounded Rectangle 20"/>
+          <p:cNvSpPr/>
+          <p:nvPr/>
+        </p:nvSpPr>
+        <p:spPr>
+          <a:xfrm>
+            <a:off x="457200" y="4279392"/>
+            <a:ext cx="11274552" cy="566928"/>
+          </a:xfrm>
+          <a:prstGeom prst="roundRect">
+            <a:avLst/>
+          </a:prstGeom>
+          <a:solidFill>
+            <a:srgbClr val="EEF3FC"/>
+          </a:solidFill>
+          <a:ln w="9525">
+            <a:solidFill>
+              <a:srgbClr val="DDE2EC"/>
+            </a:solidFill>
+          </a:ln>
+          <a:effectLst/>
+        </p:spPr>
+        <p:style>
+          <a:lnRef idx="1">
+            <a:schemeClr val="accent1"/>
+          </a:lnRef>
+          <a:fillRef idx="3">
+            <a:schemeClr val="accent1"/>
+          </a:fillRef>
+          <a:effectRef idx="2">
+            <a:schemeClr val="accent1"/>
+          </a:effectRef>
+          <a:fontRef idx="minor">
+            <a:schemeClr val="lt1"/>
+          </a:fontRef>
+        </p:style>
+        <p:txBody>
+          <a:bodyPr rtlCol="0" anchor="ctr"/>
+          <a:lstStyle/>
+          <a:p>
+            <a:pPr algn="ctr"/>
+          </a:p>
+        </p:txBody>
+      </p:sp>
+      <p:sp>
+        <p:nvSpPr>
+          <p:cNvPr id="22" name="TextBox 21"/>
+          <p:cNvSpPr txBox="1"/>
+          <p:nvPr/>
+        </p:nvSpPr>
+        <p:spPr>
+          <a:xfrm>
+            <a:off x="685800" y="4398264"/>
+            <a:ext cx="2377440" cy="365760"/>
+          </a:xfrm>
+          <a:prstGeom prst="rect">
+            <a:avLst/>
+          </a:prstGeom>
+          <a:noFill/>
+        </p:spPr>
+        <p:txBody>
+          <a:bodyPr wrap="square" anchor="t" lIns="25400" rIns="25400" tIns="12700" bIns="12700">
+            <a:spAutoFit/>
+          </a:bodyPr>
+          <a:lstStyle/>
+          <a:p>
+            <a:pPr algn="l"/>
+            <a:r>
+              <a:rPr sz="1300" b="1" i="0">
+                <a:solidFill>
+                  <a:srgbClr val="C9A227"/>
+                </a:solidFill>
+                <a:latin typeface="Calibri"/>
+              </a:rPr>
+              <a:t>Jul</a:t>
+            </a:r>
+          </a:p>
+        </p:txBody>
+      </p:sp>
+      <p:sp>
+        <p:nvSpPr>
+          <p:cNvPr id="23" name="TextBox 22"/>
+          <p:cNvSpPr txBox="1"/>
+          <p:nvPr/>
+        </p:nvSpPr>
+        <p:spPr>
+          <a:xfrm>
+            <a:off x="3108960" y="4398264"/>
+            <a:ext cx="8412480" cy="365760"/>
+          </a:xfrm>
+          <a:prstGeom prst="rect">
+            <a:avLst/>
+          </a:prstGeom>
+          <a:noFill/>
+        </p:spPr>
+        <p:txBody>
+          <a:bodyPr wrap="square" anchor="t" lIns="25400" rIns="25400" tIns="12700" bIns="12700">
+            <a:spAutoFit/>
+          </a:bodyPr>
+          <a:lstStyle/>
+          <a:p>
+            <a:pPr algn="l"/>
+            <a:r>
+              <a:rPr sz="1300" b="0" i="0">
+                <a:solidFill>
+                  <a:srgbClr val="23273B"/>
+                </a:solidFill>
+                <a:latin typeface="Calibri"/>
+              </a:rPr>
+              <a:t>Bangladesh Bank - Monetary Policy Statement for H1 FY27</a:t>
+            </a:r>
+          </a:p>
+        </p:txBody>
+      </p:sp>
+      <p:sp>
+        <p:nvSpPr>
+          <p:cNvPr id="24" name="Rounded Rectangle 23"/>
+          <p:cNvSpPr/>
+          <p:nvPr/>
+        </p:nvSpPr>
+        <p:spPr>
+          <a:xfrm>
+            <a:off x="457200" y="4937759"/>
+            <a:ext cx="11274552" cy="566928"/>
+          </a:xfrm>
+          <a:prstGeom prst="roundRect">
+            <a:avLst/>
+          </a:prstGeom>
+          <a:solidFill>
+            <a:srgbClr val="FFFFFF"/>
+          </a:solidFill>
+          <a:ln w="9525">
+            <a:solidFill>
+              <a:srgbClr val="DDE2EC"/>
+            </a:solidFill>
+          </a:ln>
+          <a:effectLst/>
+        </p:spPr>
+        <p:style>
+          <a:lnRef idx="1">
+            <a:schemeClr val="accent1"/>
+          </a:lnRef>
+          <a:fillRef idx="3">
+            <a:schemeClr val="accent1"/>
+          </a:fillRef>
+          <a:effectRef idx="2">
+            <a:schemeClr val="accent1"/>
+          </a:effectRef>
+          <a:fontRef idx="minor">
+            <a:schemeClr val="lt1"/>
+          </a:fontRef>
+        </p:style>
+        <p:txBody>
+          <a:bodyPr rtlCol="0" anchor="ctr"/>
+          <a:lstStyle/>
+          <a:p>
+            <a:pPr algn="ctr"/>
+          </a:p>
+        </p:txBody>
+      </p:sp>
+      <p:sp>
+        <p:nvSpPr>
+          <p:cNvPr id="25" name="TextBox 24"/>
+          <p:cNvSpPr txBox="1"/>
+          <p:nvPr/>
+        </p:nvSpPr>
+        <p:spPr>
+          <a:xfrm>
+            <a:off x="685800" y="5056631"/>
+            <a:ext cx="2377440" cy="365760"/>
+          </a:xfrm>
+          <a:prstGeom prst="rect">
+            <a:avLst/>
+          </a:prstGeom>
+          <a:noFill/>
+        </p:spPr>
+        <p:txBody>
+          <a:bodyPr wrap="square" anchor="t" lIns="25400" rIns="25400" tIns="12700" bIns="12700">
+            <a:spAutoFit/>
+          </a:bodyPr>
+          <a:lstStyle/>
+          <a:p>
+            <a:pPr algn="l"/>
+            <a:r>
+              <a:rPr sz="1300" b="1" i="0">
+                <a:solidFill>
+                  <a:srgbClr val="C9A227"/>
+                </a:solidFill>
+                <a:latin typeface="Calibri"/>
+              </a:rPr>
+              <a:t>Daily</a:t>
+            </a:r>
+          </a:p>
+        </p:txBody>
+      </p:sp>
+      <p:sp>
+        <p:nvSpPr>
+          <p:cNvPr id="26" name="TextBox 25"/>
+          <p:cNvSpPr txBox="1"/>
+          <p:nvPr/>
+        </p:nvSpPr>
+        <p:spPr>
+          <a:xfrm>
+            <a:off x="3108960" y="5056631"/>
+            <a:ext cx="8412480" cy="365760"/>
+          </a:xfrm>
+          <a:prstGeom prst="rect">
+            <a:avLst/>
+          </a:prstGeom>
+          <a:noFill/>
+        </p:spPr>
+        <p:txBody>
+          <a:bodyPr wrap="square" anchor="t" lIns="25400" rIns="25400" tIns="12700" bIns="12700">
+            <a:spAutoFit/>
+          </a:bodyPr>
+          <a:lstStyle/>
+          <a:p>
+            <a:pPr algn="l"/>
+            <a:r>
+              <a:rPr sz="1300" b="0" i="0">
+                <a:solidFill>
+                  <a:srgbClr val="23273B"/>
+                </a:solidFill>
+                <a:latin typeface="Calibri"/>
+              </a:rPr>
+              <a:t>Global - term SOFR, EURIBOR, gold and Brent crude</a:t>
+            </a:r>
+          </a:p>
+        </p:txBody>
+      </p:sp>
+    </p:spTree>
+  </p:cSld>
+  <p:clrMapOvr>
+    <a:masterClrMapping/>
+  </p:clrMapOvr>
+</p:sld>
+</file>
+
+<file path=ppt/slides/slide14.xml><?xml version="1.0" encoding="utf-8"?>
+<p:sld xmlns:a="http://schemas.openxmlformats.org/drawingml/2006/main" xmlns:p="http://schemas.openxmlformats.org/presentationml/2006/main" xmlns:r="http://schemas.openxmlformats.org/officeDocument/2006/relationships">
+  <p:cSld>
+    <p:spTree>
+      <p:nvGrpSpPr>
+        <p:cNvPr id="1" name=""/>
+        <p:cNvGrpSpPr/>
+        <p:nvPr/>
+      </p:nvGrpSpPr>
+      <p:grpSpPr/>
+      <p:sp>
+        <p:nvSpPr>
+          <p:cNvPr id="2" name="Rectangle 1"/>
+          <p:cNvSpPr/>
+          <p:nvPr/>
+        </p:nvSpPr>
+        <p:spPr>
+          <a:xfrm>
+            <a:off x="0" y="0"/>
+            <a:ext cx="12191695" cy="6858000"/>
+          </a:xfrm>
+          <a:prstGeom prst="rect">
+            <a:avLst/>
+          </a:prstGeom>
+          <a:solidFill>
             <a:srgbClr val="12163A"/>
           </a:solidFill>
           <a:ln>
@@ -14229,7 +14598,7 @@
                 </a:solidFill>
                 <a:latin typeface="Calibri"/>
               </a:rPr>
-              <a:t>Term SOFR spans 3.75-4.03% across tenors, while EURIBOR sits lower at 0.02%+.</a:t>
+              <a:t>Term SOFR spans 3.75-4.03% across tenors, while EURIBOR sits lower at 2.33%+.</a:t>
             </a:r>
           </a:p>
         </p:txBody>
@@ -14299,7 +14668,7 @@
                 </a:solidFill>
                 <a:latin typeface="Calibri"/>
               </a:rPr>
-              <a:t>The 3-month SOFR-EURIBOR gap is 3.73pp, a live input for currency-of-borrowing decisions.</a:t>
+              <a:t>The 3-month SOFR-EURIBOR gap is 1.42pp, a live input for currency-of-borrowing decisions.</a:t>
             </a:r>
           </a:p>
         </p:txBody>
